--- a/docs/design/recsys_diagram_large.pptx
+++ b/docs/design/recsys_diagram_large.pptx
@@ -6364,25 +6364,25 @@
           <a:p>
             <a:pPr algn="ctr"/>
             <a:r>
-              <a:rPr sz="1700">
+              <a:rPr sz="1800">
                 <a:solidFill>
                   <a:srgbClr val="19324F"/>
                 </a:solidFill>
                 <a:latin typeface="Aptos"/>
               </a:rPr>
-              <a:t>Shared Linear Projection: 1,024 → 128</a:t>
+              <a:t>Shared Linear Projection</a:t>
             </a:r>
           </a:p>
           <a:p>
             <a:pPr algn="ctr"/>
             <a:r>
-              <a:rPr sz="1500">
+              <a:rPr sz="1800">
                 <a:solidFill>
                   <a:srgbClr val="19324F"/>
                 </a:solidFill>
                 <a:latin typeface="Aptos"/>
               </a:rPr>
-              <a:t>Same weights; applied separately to Entities / Actions / Context</a:t>
+              <a:t>1,024 → 128</a:t>
             </a:r>
           </a:p>
         </p:txBody>
@@ -7919,63 +7919,6 @@
           </a:fontRef>
         </p:style>
       </p:cxnSp>
-      <p:sp>
-        <p:nvSpPr>
-          <p:cNvPr id="176" name="Shared projection branch"/>
-          <p:cNvSpPr/>
-          <p:nvPr/>
-        </p:nvSpPr>
-        <p:spPr>
-          <a:xfrm>
-            <a:off x="11430000" y="4343400"/>
-            <a:ext cx="4846320" cy="384048"/>
-          </a:xfrm>
-          <a:prstGeom prst="roundRect">
-            <a:avLst>
-              <a:gd name="adj" fmla="val 7534"/>
-            </a:avLst>
-          </a:prstGeom>
-          <a:solidFill>
-            <a:srgbClr val="FFFFFF"/>
-          </a:solidFill>
-          <a:ln w="14604">
-            <a:solidFill>
-              <a:srgbClr val="008B91"/>
-            </a:solidFill>
-          </a:ln>
-          <a:effectLst/>
-        </p:spPr>
-        <p:style>
-          <a:lnRef idx="1">
-            <a:schemeClr val="accent1"/>
-          </a:lnRef>
-          <a:fillRef idx="3">
-            <a:schemeClr val="accent1"/>
-          </a:fillRef>
-          <a:effectRef idx="0">
-            <a:schemeClr val="accent1"/>
-          </a:effectRef>
-          <a:fontRef idx="minor">
-            <a:schemeClr val="lt1"/>
-          </a:fontRef>
-        </p:style>
-        <p:txBody>
-          <a:bodyPr rtlCol="0" anchor="ctr" wrap="square" lIns="54864" rIns="54864" tIns="27432" bIns="27432"/>
-          <a:lstStyle/>
-          <a:p>
-            <a:pPr algn="ctr"/>
-            <a:r>
-              <a:rPr sz="1600">
-                <a:solidFill>
-                  <a:srgbClr val="19324F"/>
-                </a:solidFill>
-                <a:latin typeface="Aptos"/>
-              </a:rPr>
-              <a:t>Entity / action node-type embedding</a:t>
-            </a:r>
-          </a:p>
-        </p:txBody>
-      </p:sp>
       <p:cxnSp>
         <p:nvCxnSpPr>
           <p:cNvPr id="177" name="Shared projection branch"/>
@@ -7985,7 +7928,7 @@
         <p:spPr>
           <a:xfrm>
             <a:off x="12573000" y="4206240"/>
-            <a:ext cx="0" cy="137160"/>
+            <a:ext cx="0" cy="182880"/>
           </a:xfrm>
           <a:prstGeom prst="line">
             <a:avLst/>
@@ -8022,7 +7965,7 @@
         <p:spPr>
           <a:xfrm>
             <a:off x="15133320" y="4206240"/>
-            <a:ext cx="0" cy="137160"/>
+            <a:ext cx="0" cy="182880"/>
           </a:xfrm>
           <a:prstGeom prst="line">
             <a:avLst/>
@@ -8080,6 +8023,263 @@
             <a:schemeClr val="accent1"/>
           </a:fillRef>
           <a:effectRef idx="0">
+            <a:schemeClr val="accent1"/>
+          </a:effectRef>
+          <a:fontRef idx="minor">
+            <a:schemeClr val="tx1"/>
+          </a:fontRef>
+        </p:style>
+      </p:cxnSp>
+      <p:sp>
+        <p:nvSpPr>
+          <p:cNvPr id="180" name="Node-type addition caption"/>
+          <p:cNvSpPr txBox="1"/>
+          <p:nvPr/>
+        </p:nvSpPr>
+        <p:spPr>
+          <a:xfrm>
+            <a:off x="12710160" y="4379976"/>
+            <a:ext cx="2286000" cy="274320"/>
+          </a:xfrm>
+          <a:prstGeom prst="rect">
+            <a:avLst/>
+          </a:prstGeom>
+          <a:noFill/>
+        </p:spPr>
+        <p:txBody>
+          <a:bodyPr wrap="none" lIns="0" rIns="0" tIns="0" bIns="0" anchor="ctr">
+            <a:noAutofit/>
+          </a:bodyPr>
+          <a:lstStyle/>
+          <a:p>
+            <a:pPr algn="ctr"/>
+            <a:r>
+              <a:rPr sz="1500">
+                <a:solidFill>
+                  <a:srgbClr val="008B91"/>
+                </a:solidFill>
+                <a:latin typeface="Liberation Sans"/>
+              </a:rPr>
+              <a:t>Add node-type embedding</a:t>
+            </a:r>
+          </a:p>
+        </p:txBody>
+      </p:sp>
+      <p:sp>
+        <p:nvSpPr>
+          <p:cNvPr id="181" name="Entity node-type addition"/>
+          <p:cNvSpPr/>
+          <p:nvPr/>
+        </p:nvSpPr>
+        <p:spPr>
+          <a:xfrm>
+            <a:off x="12444984" y="4389120"/>
+            <a:ext cx="256032" cy="256032"/>
+          </a:xfrm>
+          <a:prstGeom prst="ellipse">
+            <a:avLst/>
+          </a:prstGeom>
+          <a:solidFill>
+            <a:srgbClr val="FFFFFF"/>
+          </a:solidFill>
+          <a:ln w="15240">
+            <a:solidFill>
+              <a:srgbClr val="008B91"/>
+            </a:solidFill>
+          </a:ln>
+          <a:effectLst/>
+        </p:spPr>
+        <p:style>
+          <a:lnRef idx="1">
+            <a:schemeClr val="accent1"/>
+          </a:lnRef>
+          <a:fillRef idx="3">
+            <a:schemeClr val="accent1"/>
+          </a:fillRef>
+          <a:effectRef idx="2">
+            <a:schemeClr val="accent1"/>
+          </a:effectRef>
+          <a:fontRef idx="minor">
+            <a:schemeClr val="lt1"/>
+          </a:fontRef>
+        </p:style>
+        <p:txBody>
+          <a:bodyPr rtlCol="0" anchor="ctr" lIns="0" rIns="0" tIns="0" bIns="0">
+            <a:noAutofit/>
+          </a:bodyPr>
+          <a:lstStyle/>
+          <a:p>
+            <a:pPr algn="ctr"/>
+            <a:r>
+              <a:rPr sz="1600">
+                <a:solidFill>
+                  <a:srgbClr val="008B91"/>
+                </a:solidFill>
+                <a:latin typeface="Liberation Sans"/>
+              </a:rPr>
+              <a:t>+</a:t>
+            </a:r>
+          </a:p>
+        </p:txBody>
+      </p:sp>
+      <p:sp>
+        <p:nvSpPr>
+          <p:cNvPr id="182" name="Action node-type addition"/>
+          <p:cNvSpPr/>
+          <p:nvPr/>
+        </p:nvSpPr>
+        <p:spPr>
+          <a:xfrm>
+            <a:off x="15005304" y="4389120"/>
+            <a:ext cx="256032" cy="256032"/>
+          </a:xfrm>
+          <a:prstGeom prst="ellipse">
+            <a:avLst/>
+          </a:prstGeom>
+          <a:solidFill>
+            <a:srgbClr val="FFFFFF"/>
+          </a:solidFill>
+          <a:ln w="15240">
+            <a:solidFill>
+              <a:srgbClr val="008B91"/>
+            </a:solidFill>
+          </a:ln>
+          <a:effectLst/>
+        </p:spPr>
+        <p:style>
+          <a:lnRef idx="1">
+            <a:schemeClr val="accent1"/>
+          </a:lnRef>
+          <a:fillRef idx="3">
+            <a:schemeClr val="accent1"/>
+          </a:fillRef>
+          <a:effectRef idx="2">
+            <a:schemeClr val="accent1"/>
+          </a:effectRef>
+          <a:fontRef idx="minor">
+            <a:schemeClr val="lt1"/>
+          </a:fontRef>
+        </p:style>
+        <p:txBody>
+          <a:bodyPr rtlCol="0" anchor="ctr" lIns="0" rIns="0" tIns="0" bIns="0">
+            <a:noAutofit/>
+          </a:bodyPr>
+          <a:lstStyle/>
+          <a:p>
+            <a:pPr algn="ctr"/>
+            <a:r>
+              <a:rPr sz="1600">
+                <a:solidFill>
+                  <a:srgbClr val="008B91"/>
+                </a:solidFill>
+                <a:latin typeface="Liberation Sans"/>
+              </a:rPr>
+              <a:t>+</a:t>
+            </a:r>
+          </a:p>
+        </p:txBody>
+      </p:sp>
+      <p:cxnSp>
+        <p:nvCxnSpPr>
+          <p:cNvPr id="183" name="Entity addition output"/>
+          <p:cNvCxnSpPr/>
+          <p:nvPr/>
+        </p:nvCxnSpPr>
+        <p:spPr>
+          <a:xfrm>
+            <a:off x="12573000" y="4645152"/>
+            <a:ext cx="0" cy="82296"/>
+          </a:xfrm>
+          <a:prstGeom prst="line">
+            <a:avLst/>
+          </a:prstGeom>
+          <a:ln w="15240">
+            <a:solidFill>
+              <a:srgbClr val="008B91"/>
+            </a:solidFill>
+          </a:ln>
+          <a:effectLst/>
+        </p:spPr>
+        <p:style>
+          <a:lnRef idx="2">
+            <a:schemeClr val="accent1"/>
+          </a:lnRef>
+          <a:fillRef idx="0">
+            <a:schemeClr val="accent1"/>
+          </a:fillRef>
+          <a:effectRef idx="1">
+            <a:schemeClr val="accent1"/>
+          </a:effectRef>
+          <a:fontRef idx="minor">
+            <a:schemeClr val="tx1"/>
+          </a:fontRef>
+        </p:style>
+      </p:cxnSp>
+      <p:cxnSp>
+        <p:nvCxnSpPr>
+          <p:cNvPr id="184" name="Action addition output"/>
+          <p:cNvCxnSpPr/>
+          <p:nvPr/>
+        </p:nvCxnSpPr>
+        <p:spPr>
+          <a:xfrm>
+            <a:off x="15133320" y="4645152"/>
+            <a:ext cx="0" cy="82296"/>
+          </a:xfrm>
+          <a:prstGeom prst="line">
+            <a:avLst/>
+          </a:prstGeom>
+          <a:ln w="15240">
+            <a:solidFill>
+              <a:srgbClr val="008B91"/>
+            </a:solidFill>
+          </a:ln>
+          <a:effectLst/>
+        </p:spPr>
+        <p:style>
+          <a:lnRef idx="2">
+            <a:schemeClr val="accent1"/>
+          </a:lnRef>
+          <a:fillRef idx="0">
+            <a:schemeClr val="accent1"/>
+          </a:fillRef>
+          <a:effectRef idx="1">
+            <a:schemeClr val="accent1"/>
+          </a:effectRef>
+          <a:fontRef idx="minor">
+            <a:schemeClr val="tx1"/>
+          </a:fontRef>
+        </p:style>
+      </p:cxnSp>
+      <p:cxnSp>
+        <p:nvCxnSpPr>
+          <p:cNvPr id="185" name="Added node features merge"/>
+          <p:cNvCxnSpPr/>
+          <p:nvPr/>
+        </p:nvCxnSpPr>
+        <p:spPr>
+          <a:xfrm>
+            <a:off x="12573000" y="4727448"/>
+            <a:ext cx="2560320" cy="0"/>
+          </a:xfrm>
+          <a:prstGeom prst="line">
+            <a:avLst/>
+          </a:prstGeom>
+          <a:ln w="15240">
+            <a:solidFill>
+              <a:srgbClr val="008B91"/>
+            </a:solidFill>
+          </a:ln>
+          <a:effectLst/>
+        </p:spPr>
+        <p:style>
+          <a:lnRef idx="2">
+            <a:schemeClr val="accent1"/>
+          </a:lnRef>
+          <a:fillRef idx="0">
+            <a:schemeClr val="accent1"/>
+          </a:fillRef>
+          <a:effectRef idx="1">
             <a:schemeClr val="accent1"/>
           </a:effectRef>
           <a:fontRef idx="minor">
